--- a/MarchMadness_Analysis.pptx
+++ b/MarchMadness_Analysis.pptx
@@ -5,7 +5,7 @@
     <p:sldMasterId id="2147483648" r:id="rId1"/>
   </p:sldMasterIdLst>
   <p:notesMasterIdLst>
-    <p:notesMasterId r:id="rId18"/>
+    <p:notesMasterId r:id="rId15"/>
   </p:notesMasterIdLst>
   <p:sldIdLst>
     <p:sldId id="256" r:id="rId2"/>
@@ -15,15 +15,12 @@
     <p:sldId id="260" r:id="rId6"/>
     <p:sldId id="261" r:id="rId7"/>
     <p:sldId id="262" r:id="rId8"/>
-    <p:sldId id="263" r:id="rId9"/>
-    <p:sldId id="264" r:id="rId10"/>
-    <p:sldId id="265" r:id="rId11"/>
-    <p:sldId id="266" r:id="rId12"/>
-    <p:sldId id="267" r:id="rId13"/>
-    <p:sldId id="268" r:id="rId14"/>
-    <p:sldId id="269" r:id="rId15"/>
-    <p:sldId id="270" r:id="rId16"/>
-    <p:sldId id="271" r:id="rId17"/>
+    <p:sldId id="264" r:id="rId9"/>
+    <p:sldId id="265" r:id="rId10"/>
+    <p:sldId id="267" r:id="rId11"/>
+    <p:sldId id="268" r:id="rId12"/>
+    <p:sldId id="270" r:id="rId13"/>
+    <p:sldId id="271" r:id="rId14"/>
   </p:sldIdLst>
   <p:sldSz cx="9144000" cy="5143500" type="screen16x9"/>
   <p:notesSz cx="5143500" cy="9144000"/>
@@ -125,6 +122,214 @@
     </p:ext>
   </p:extLst>
 </p:presentation>
+</file>
+
+<file path=ppt/revisionInfo.xml><?xml version="1.0" encoding="utf-8"?>
+<p1510:revInfo xmlns:a="http://schemas.openxmlformats.org/drawingml/2006/main" xmlns:r="http://schemas.openxmlformats.org/officeDocument/2006/relationships" xmlns:p1510="http://schemas.microsoft.com/office/powerpoint/2015/10/main">
+  <p1510:revLst>
+    <p1510:client id="{FEC601F0-C33D-4AED-8418-A6AAD0965B08}" v="5" dt="2026-04-29T17:38:58.909"/>
+  </p1510:revLst>
+</p1510:revInfo>
+</file>
+
+<file path=ppt/changesInfos/changesInfo1.xml><?xml version="1.0" encoding="utf-8"?>
+<pc:chgInfo xmlns:a="http://schemas.openxmlformats.org/drawingml/2006/main" xmlns:r="http://schemas.openxmlformats.org/officeDocument/2006/relationships" xmlns:ac="http://schemas.microsoft.com/office/drawing/2013/main/command" xmlns:pc="http://schemas.microsoft.com/office/powerpoint/2013/main/command">
+  <pc:docChgLst>
+    <pc:chgData name="Zeghibe, Michael W" userId="19d047e5-9c41-4071-99e6-7fc18e142dcf" providerId="ADAL" clId="{4E03CE7B-4AAF-4696-8E72-F7B31D2C120D}"/>
+    <pc:docChg chg="undo custSel delSld modSld">
+      <pc:chgData name="Zeghibe, Michael W" userId="19d047e5-9c41-4071-99e6-7fc18e142dcf" providerId="ADAL" clId="{4E03CE7B-4AAF-4696-8E72-F7B31D2C120D}" dt="2026-04-29T18:09:55.768" v="133" actId="1076"/>
+      <pc:docMkLst>
+        <pc:docMk/>
+      </pc:docMkLst>
+      <pc:sldChg chg="addSp delSp modSp mod">
+        <pc:chgData name="Zeghibe, Michael W" userId="19d047e5-9c41-4071-99e6-7fc18e142dcf" providerId="ADAL" clId="{4E03CE7B-4AAF-4696-8E72-F7B31D2C120D}" dt="2026-04-29T17:39:50.321" v="20" actId="14100"/>
+        <pc:sldMkLst>
+          <pc:docMk/>
+          <pc:sldMk cId="0" sldId="260"/>
+        </pc:sldMkLst>
+        <pc:spChg chg="add del mod">
+          <ac:chgData name="Zeghibe, Michael W" userId="19d047e5-9c41-4071-99e6-7fc18e142dcf" providerId="ADAL" clId="{4E03CE7B-4AAF-4696-8E72-F7B31D2C120D}" dt="2026-04-29T17:37:45.140" v="11" actId="478"/>
+          <ac:spMkLst>
+            <pc:docMk/>
+            <pc:sldMk cId="0" sldId="260"/>
+            <ac:spMk id="6" creationId="{87C5B8CA-B754-9784-C0C4-65236C915127}"/>
+          </ac:spMkLst>
+        </pc:spChg>
+        <pc:picChg chg="mod">
+          <ac:chgData name="Zeghibe, Michael W" userId="19d047e5-9c41-4071-99e6-7fc18e142dcf" providerId="ADAL" clId="{4E03CE7B-4AAF-4696-8E72-F7B31D2C120D}" dt="2026-04-29T17:39:50.321" v="20" actId="14100"/>
+          <ac:picMkLst>
+            <pc:docMk/>
+            <pc:sldMk cId="0" sldId="260"/>
+            <ac:picMk id="4" creationId="{00000000-0000-0000-0000-000000000000}"/>
+          </ac:picMkLst>
+        </pc:picChg>
+      </pc:sldChg>
+      <pc:sldChg chg="modSp mod">
+        <pc:chgData name="Zeghibe, Michael W" userId="19d047e5-9c41-4071-99e6-7fc18e142dcf" providerId="ADAL" clId="{4E03CE7B-4AAF-4696-8E72-F7B31D2C120D}" dt="2026-04-27T17:47:56.425" v="4" actId="1036"/>
+        <pc:sldMkLst>
+          <pc:docMk/>
+          <pc:sldMk cId="0" sldId="262"/>
+        </pc:sldMkLst>
+        <pc:picChg chg="mod">
+          <ac:chgData name="Zeghibe, Michael W" userId="19d047e5-9c41-4071-99e6-7fc18e142dcf" providerId="ADAL" clId="{4E03CE7B-4AAF-4696-8E72-F7B31D2C120D}" dt="2026-04-27T17:47:56.425" v="4" actId="1036"/>
+          <ac:picMkLst>
+            <pc:docMk/>
+            <pc:sldMk cId="0" sldId="262"/>
+            <ac:picMk id="4" creationId="{00000000-0000-0000-0000-000000000000}"/>
+          </ac:picMkLst>
+        </pc:picChg>
+      </pc:sldChg>
+      <pc:sldChg chg="addSp delSp modSp del mod">
+        <pc:chgData name="Zeghibe, Michael W" userId="19d047e5-9c41-4071-99e6-7fc18e142dcf" providerId="ADAL" clId="{4E03CE7B-4AAF-4696-8E72-F7B31D2C120D}" dt="2026-04-29T17:42:46.142" v="21" actId="47"/>
+        <pc:sldMkLst>
+          <pc:docMk/>
+          <pc:sldMk cId="0" sldId="263"/>
+        </pc:sldMkLst>
+        <pc:spChg chg="add del mod">
+          <ac:chgData name="Zeghibe, Michael W" userId="19d047e5-9c41-4071-99e6-7fc18e142dcf" providerId="ADAL" clId="{4E03CE7B-4AAF-4696-8E72-F7B31D2C120D}" dt="2026-04-29T17:38:16.422" v="16" actId="1076"/>
+          <ac:spMkLst>
+            <pc:docMk/>
+            <pc:sldMk cId="0" sldId="263"/>
+            <ac:spMk id="10" creationId="{00000000-0000-0000-0000-000000000000}"/>
+          </ac:spMkLst>
+        </pc:spChg>
+        <pc:picChg chg="add del mod">
+          <ac:chgData name="Zeghibe, Michael W" userId="19d047e5-9c41-4071-99e6-7fc18e142dcf" providerId="ADAL" clId="{4E03CE7B-4AAF-4696-8E72-F7B31D2C120D}" dt="2026-04-29T17:38:59.280" v="19" actId="478"/>
+          <ac:picMkLst>
+            <pc:docMk/>
+            <pc:sldMk cId="0" sldId="263"/>
+            <ac:picMk id="4" creationId="{00000000-0000-0000-0000-000000000000}"/>
+          </ac:picMkLst>
+        </pc:picChg>
+        <pc:picChg chg="add mod">
+          <ac:chgData name="Zeghibe, Michael W" userId="19d047e5-9c41-4071-99e6-7fc18e142dcf" providerId="ADAL" clId="{4E03CE7B-4AAF-4696-8E72-F7B31D2C120D}" dt="2026-04-29T17:38:13.638" v="14"/>
+          <ac:picMkLst>
+            <pc:docMk/>
+            <pc:sldMk cId="0" sldId="263"/>
+            <ac:picMk id="15" creationId="{B2B0F300-247F-4770-7E17-669744E7B1A2}"/>
+          </ac:picMkLst>
+        </pc:picChg>
+        <pc:picChg chg="add mod">
+          <ac:chgData name="Zeghibe, Michael W" userId="19d047e5-9c41-4071-99e6-7fc18e142dcf" providerId="ADAL" clId="{4E03CE7B-4AAF-4696-8E72-F7B31D2C120D}" dt="2026-04-29T17:38:25.272" v="18"/>
+          <ac:picMkLst>
+            <pc:docMk/>
+            <pc:sldMk cId="0" sldId="263"/>
+            <ac:picMk id="16" creationId="{D85E64D5-083C-0BD5-7B1B-8C4FBF325940}"/>
+          </ac:picMkLst>
+        </pc:picChg>
+      </pc:sldChg>
+      <pc:sldChg chg="addSp delSp modSp mod">
+        <pc:chgData name="Zeghibe, Michael W" userId="19d047e5-9c41-4071-99e6-7fc18e142dcf" providerId="ADAL" clId="{4E03CE7B-4AAF-4696-8E72-F7B31D2C120D}" dt="2026-04-29T18:09:55.768" v="133" actId="1076"/>
+        <pc:sldMkLst>
+          <pc:docMk/>
+          <pc:sldMk cId="0" sldId="265"/>
+        </pc:sldMkLst>
+        <pc:spChg chg="mod">
+          <ac:chgData name="Zeghibe, Michael W" userId="19d047e5-9c41-4071-99e6-7fc18e142dcf" providerId="ADAL" clId="{4E03CE7B-4AAF-4696-8E72-F7B31D2C120D}" dt="2026-04-29T18:07:59.799" v="106" actId="20577"/>
+          <ac:spMkLst>
+            <pc:docMk/>
+            <pc:sldMk cId="0" sldId="265"/>
+            <ac:spMk id="6" creationId="{00000000-0000-0000-0000-000000000000}"/>
+          </ac:spMkLst>
+        </pc:spChg>
+        <pc:spChg chg="mod">
+          <ac:chgData name="Zeghibe, Michael W" userId="19d047e5-9c41-4071-99e6-7fc18e142dcf" providerId="ADAL" clId="{4E03CE7B-4AAF-4696-8E72-F7B31D2C120D}" dt="2026-04-29T18:06:19.612" v="42" actId="20577"/>
+          <ac:spMkLst>
+            <pc:docMk/>
+            <pc:sldMk cId="0" sldId="265"/>
+            <ac:spMk id="7" creationId="{00000000-0000-0000-0000-000000000000}"/>
+          </ac:spMkLst>
+        </pc:spChg>
+        <pc:spChg chg="mod">
+          <ac:chgData name="Zeghibe, Michael W" userId="19d047e5-9c41-4071-99e6-7fc18e142dcf" providerId="ADAL" clId="{4E03CE7B-4AAF-4696-8E72-F7B31D2C120D}" dt="2026-04-29T18:09:45.490" v="129" actId="14100"/>
+          <ac:spMkLst>
+            <pc:docMk/>
+            <pc:sldMk cId="0" sldId="265"/>
+            <ac:spMk id="8" creationId="{00000000-0000-0000-0000-000000000000}"/>
+          </ac:spMkLst>
+        </pc:spChg>
+        <pc:spChg chg="mod">
+          <ac:chgData name="Zeghibe, Michael W" userId="19d047e5-9c41-4071-99e6-7fc18e142dcf" providerId="ADAL" clId="{4E03CE7B-4AAF-4696-8E72-F7B31D2C120D}" dt="2026-04-29T18:09:54.106" v="132" actId="14100"/>
+          <ac:spMkLst>
+            <pc:docMk/>
+            <pc:sldMk cId="0" sldId="265"/>
+            <ac:spMk id="9" creationId="{00000000-0000-0000-0000-000000000000}"/>
+          </ac:spMkLst>
+        </pc:spChg>
+        <pc:spChg chg="add del">
+          <ac:chgData name="Zeghibe, Michael W" userId="19d047e5-9c41-4071-99e6-7fc18e142dcf" providerId="ADAL" clId="{4E03CE7B-4AAF-4696-8E72-F7B31D2C120D}" dt="2026-04-29T18:05:01.716" v="26" actId="22"/>
+          <ac:spMkLst>
+            <pc:docMk/>
+            <pc:sldMk cId="0" sldId="265"/>
+            <ac:spMk id="11" creationId="{391A6E4C-5E66-BD8F-69F1-BBE248F9F635}"/>
+          </ac:spMkLst>
+        </pc:spChg>
+        <pc:picChg chg="del">
+          <ac:chgData name="Zeghibe, Michael W" userId="19d047e5-9c41-4071-99e6-7fc18e142dcf" providerId="ADAL" clId="{4E03CE7B-4AAF-4696-8E72-F7B31D2C120D}" dt="2026-04-29T18:06:08.793" v="32" actId="478"/>
+          <ac:picMkLst>
+            <pc:docMk/>
+            <pc:sldMk cId="0" sldId="265"/>
+            <ac:picMk id="4" creationId="{00000000-0000-0000-0000-000000000000}"/>
+          </ac:picMkLst>
+        </pc:picChg>
+        <pc:picChg chg="add del">
+          <ac:chgData name="Zeghibe, Michael W" userId="19d047e5-9c41-4071-99e6-7fc18e142dcf" providerId="ADAL" clId="{4E03CE7B-4AAF-4696-8E72-F7B31D2C120D}" dt="2026-04-29T18:06:10.030" v="33" actId="478"/>
+          <ac:picMkLst>
+            <pc:docMk/>
+            <pc:sldMk cId="0" sldId="265"/>
+            <ac:picMk id="5" creationId="{00000000-0000-0000-0000-000000000000}"/>
+          </ac:picMkLst>
+        </pc:picChg>
+        <pc:picChg chg="add del mod">
+          <ac:chgData name="Zeghibe, Michael W" userId="19d047e5-9c41-4071-99e6-7fc18e142dcf" providerId="ADAL" clId="{4E03CE7B-4AAF-4696-8E72-F7B31D2C120D}" dt="2026-04-29T18:09:10.465" v="124" actId="478"/>
+          <ac:picMkLst>
+            <pc:docMk/>
+            <pc:sldMk cId="0" sldId="265"/>
+            <ac:picMk id="13" creationId="{1D44675B-943C-1354-F8D0-F67396462701}"/>
+          </ac:picMkLst>
+        </pc:picChg>
+        <pc:picChg chg="add mod">
+          <ac:chgData name="Zeghibe, Michael W" userId="19d047e5-9c41-4071-99e6-7fc18e142dcf" providerId="ADAL" clId="{4E03CE7B-4AAF-4696-8E72-F7B31D2C120D}" dt="2026-04-29T18:09:25.172" v="125" actId="14100"/>
+          <ac:picMkLst>
+            <pc:docMk/>
+            <pc:sldMk cId="0" sldId="265"/>
+            <ac:picMk id="15" creationId="{67E0E947-58EB-D702-5724-1196640EBFFD}"/>
+          </ac:picMkLst>
+        </pc:picChg>
+        <pc:picChg chg="add mod">
+          <ac:chgData name="Zeghibe, Michael W" userId="19d047e5-9c41-4071-99e6-7fc18e142dcf" providerId="ADAL" clId="{4E03CE7B-4AAF-4696-8E72-F7B31D2C120D}" dt="2026-04-29T18:08:44.869" v="118" actId="1076"/>
+          <ac:picMkLst>
+            <pc:docMk/>
+            <pc:sldMk cId="0" sldId="265"/>
+            <ac:picMk id="17" creationId="{1FB88FE1-7389-4E3D-FD36-BD242B79FBC5}"/>
+          </ac:picMkLst>
+        </pc:picChg>
+        <pc:picChg chg="add mod">
+          <ac:chgData name="Zeghibe, Michael W" userId="19d047e5-9c41-4071-99e6-7fc18e142dcf" providerId="ADAL" clId="{4E03CE7B-4AAF-4696-8E72-F7B31D2C120D}" dt="2026-04-29T18:09:55.768" v="133" actId="1076"/>
+          <ac:picMkLst>
+            <pc:docMk/>
+            <pc:sldMk cId="0" sldId="265"/>
+            <ac:picMk id="19" creationId="{A0D5F88A-CD1B-3FDE-6880-A29FE865B443}"/>
+          </ac:picMkLst>
+        </pc:picChg>
+      </pc:sldChg>
+      <pc:sldChg chg="modSp del mod">
+        <pc:chgData name="Zeghibe, Michael W" userId="19d047e5-9c41-4071-99e6-7fc18e142dcf" providerId="ADAL" clId="{4E03CE7B-4AAF-4696-8E72-F7B31D2C120D}" dt="2026-04-29T17:36:46.474" v="7" actId="47"/>
+        <pc:sldMkLst>
+          <pc:docMk/>
+          <pc:sldMk cId="0" sldId="266"/>
+        </pc:sldMkLst>
+      </pc:sldChg>
+      <pc:sldChg chg="del">
+        <pc:chgData name="Zeghibe, Michael W" userId="19d047e5-9c41-4071-99e6-7fc18e142dcf" providerId="ADAL" clId="{4E03CE7B-4AAF-4696-8E72-F7B31D2C120D}" dt="2026-04-29T17:36:33.699" v="6" actId="47"/>
+        <pc:sldMkLst>
+          <pc:docMk/>
+          <pc:sldMk cId="0" sldId="269"/>
+        </pc:sldMkLst>
+      </pc:sldChg>
+    </pc:docChg>
+  </pc:docChgLst>
+</pc:chgInfo>
 </file>
 
 <file path=ppt/notesMasters/notesMaster1.xml><?xml version="1.0" encoding="utf-8"?>
@@ -654,258 +859,6 @@
             <a:fld id="{F7021451-1387-4CA6-816F-3879F97B5CBC}" type="slidenum">
               <a:rPr lang="en-US"/>
               <a:t>13</a:t>
-            </a:fld>
-            <a:endParaRPr lang="en-US"/>
-          </a:p>
-        </p:txBody>
-      </p:sp>
-    </p:spTree>
-    <p:extLst>
-      <p:ext uri="{BB962C8B-B14F-4D97-AF65-F5344CB8AC3E}">
-        <p14:creationId xmlns:p14="http://schemas.microsoft.com/office/powerpoint/2010/main" val="1024086991"/>
-      </p:ext>
-    </p:extLst>
-  </p:cSld>
-  <p:clrMapOvr>
-    <a:masterClrMapping/>
-  </p:clrMapOvr>
-</p:notes>
-</file>
-
-<file path=ppt/notesSlides/notesSlide14.xml><?xml version="1.0" encoding="utf-8"?>
-<p:notes xmlns:a="http://schemas.openxmlformats.org/drawingml/2006/main" xmlns:r="http://schemas.openxmlformats.org/officeDocument/2006/relationships" xmlns:p="http://schemas.openxmlformats.org/presentationml/2006/main">
-  <p:cSld>
-    <p:spTree>
-      <p:nvGrpSpPr>
-        <p:cNvPr id="1" name=""/>
-        <p:cNvGrpSpPr/>
-        <p:nvPr/>
-      </p:nvGrpSpPr>
-      <p:grpSpPr>
-        <a:xfrm>
-          <a:off x="0" y="0"/>
-          <a:ext cx="0" cy="0"/>
-          <a:chOff x="0" y="0"/>
-          <a:chExt cx="0" cy="0"/>
-        </a:xfrm>
-      </p:grpSpPr>
-      <p:sp>
-        <p:nvSpPr>
-          <p:cNvPr id="2" name="Slide Image Placeholder 1"/>
-          <p:cNvSpPr>
-            <a:spLocks noGrp="1" noRot="1" noChangeAspect="1"/>
-          </p:cNvSpPr>
-          <p:nvPr>
-            <p:ph type="sldImg"/>
-          </p:nvPr>
-        </p:nvSpPr>
-        <p:spPr/>
-      </p:sp>
-      <p:sp>
-        <p:nvSpPr>
-          <p:cNvPr id="3" name="Notes Placeholder 2"/>
-          <p:cNvSpPr>
-            <a:spLocks noGrp="1"/>
-          </p:cNvSpPr>
-          <p:nvPr>
-            <p:ph type="body" idx="1"/>
-          </p:nvPr>
-        </p:nvSpPr>
-        <p:spPr/>
-        <p:txBody>
-          <a:bodyPr/>
-          <a:lstStyle/>
-          <a:p>
-            <a:endParaRPr lang="en-US" dirty="0"/>
-          </a:p>
-        </p:txBody>
-      </p:sp>
-      <p:sp>
-        <p:nvSpPr>
-          <p:cNvPr id="4" name="Slide Number Placeholder 3"/>
-          <p:cNvSpPr>
-            <a:spLocks noGrp="1"/>
-          </p:cNvSpPr>
-          <p:nvPr>
-            <p:ph type="sldNum" sz="quarter" idx="10"/>
-          </p:nvPr>
-        </p:nvSpPr>
-        <p:spPr/>
-        <p:txBody>
-          <a:bodyPr/>
-          <a:lstStyle/>
-          <a:p>
-            <a:fld id="{F7021451-1387-4CA6-816F-3879F97B5CBC}" type="slidenum">
-              <a:rPr lang="en-US"/>
-              <a:t>14</a:t>
-            </a:fld>
-            <a:endParaRPr lang="en-US"/>
-          </a:p>
-        </p:txBody>
-      </p:sp>
-    </p:spTree>
-    <p:extLst>
-      <p:ext uri="{BB962C8B-B14F-4D97-AF65-F5344CB8AC3E}">
-        <p14:creationId xmlns:p14="http://schemas.microsoft.com/office/powerpoint/2010/main" val="1024086991"/>
-      </p:ext>
-    </p:extLst>
-  </p:cSld>
-  <p:clrMapOvr>
-    <a:masterClrMapping/>
-  </p:clrMapOvr>
-</p:notes>
-</file>
-
-<file path=ppt/notesSlides/notesSlide15.xml><?xml version="1.0" encoding="utf-8"?>
-<p:notes xmlns:a="http://schemas.openxmlformats.org/drawingml/2006/main" xmlns:r="http://schemas.openxmlformats.org/officeDocument/2006/relationships" xmlns:p="http://schemas.openxmlformats.org/presentationml/2006/main">
-  <p:cSld>
-    <p:spTree>
-      <p:nvGrpSpPr>
-        <p:cNvPr id="1" name=""/>
-        <p:cNvGrpSpPr/>
-        <p:nvPr/>
-      </p:nvGrpSpPr>
-      <p:grpSpPr>
-        <a:xfrm>
-          <a:off x="0" y="0"/>
-          <a:ext cx="0" cy="0"/>
-          <a:chOff x="0" y="0"/>
-          <a:chExt cx="0" cy="0"/>
-        </a:xfrm>
-      </p:grpSpPr>
-      <p:sp>
-        <p:nvSpPr>
-          <p:cNvPr id="2" name="Slide Image Placeholder 1"/>
-          <p:cNvSpPr>
-            <a:spLocks noGrp="1" noRot="1" noChangeAspect="1"/>
-          </p:cNvSpPr>
-          <p:nvPr>
-            <p:ph type="sldImg"/>
-          </p:nvPr>
-        </p:nvSpPr>
-        <p:spPr/>
-      </p:sp>
-      <p:sp>
-        <p:nvSpPr>
-          <p:cNvPr id="3" name="Notes Placeholder 2"/>
-          <p:cNvSpPr>
-            <a:spLocks noGrp="1"/>
-          </p:cNvSpPr>
-          <p:nvPr>
-            <p:ph type="body" idx="1"/>
-          </p:nvPr>
-        </p:nvSpPr>
-        <p:spPr/>
-        <p:txBody>
-          <a:bodyPr/>
-          <a:lstStyle/>
-          <a:p>
-            <a:endParaRPr lang="en-US" dirty="0"/>
-          </a:p>
-        </p:txBody>
-      </p:sp>
-      <p:sp>
-        <p:nvSpPr>
-          <p:cNvPr id="4" name="Slide Number Placeholder 3"/>
-          <p:cNvSpPr>
-            <a:spLocks noGrp="1"/>
-          </p:cNvSpPr>
-          <p:nvPr>
-            <p:ph type="sldNum" sz="quarter" idx="10"/>
-          </p:nvPr>
-        </p:nvSpPr>
-        <p:spPr/>
-        <p:txBody>
-          <a:bodyPr/>
-          <a:lstStyle/>
-          <a:p>
-            <a:fld id="{F7021451-1387-4CA6-816F-3879F97B5CBC}" type="slidenum">
-              <a:rPr lang="en-US"/>
-              <a:t>15</a:t>
-            </a:fld>
-            <a:endParaRPr lang="en-US"/>
-          </a:p>
-        </p:txBody>
-      </p:sp>
-    </p:spTree>
-    <p:extLst>
-      <p:ext uri="{BB962C8B-B14F-4D97-AF65-F5344CB8AC3E}">
-        <p14:creationId xmlns:p14="http://schemas.microsoft.com/office/powerpoint/2010/main" val="1024086991"/>
-      </p:ext>
-    </p:extLst>
-  </p:cSld>
-  <p:clrMapOvr>
-    <a:masterClrMapping/>
-  </p:clrMapOvr>
-</p:notes>
-</file>
-
-<file path=ppt/notesSlides/notesSlide16.xml><?xml version="1.0" encoding="utf-8"?>
-<p:notes xmlns:a="http://schemas.openxmlformats.org/drawingml/2006/main" xmlns:r="http://schemas.openxmlformats.org/officeDocument/2006/relationships" xmlns:p="http://schemas.openxmlformats.org/presentationml/2006/main">
-  <p:cSld>
-    <p:spTree>
-      <p:nvGrpSpPr>
-        <p:cNvPr id="1" name=""/>
-        <p:cNvGrpSpPr/>
-        <p:nvPr/>
-      </p:nvGrpSpPr>
-      <p:grpSpPr>
-        <a:xfrm>
-          <a:off x="0" y="0"/>
-          <a:ext cx="0" cy="0"/>
-          <a:chOff x="0" y="0"/>
-          <a:chExt cx="0" cy="0"/>
-        </a:xfrm>
-      </p:grpSpPr>
-      <p:sp>
-        <p:nvSpPr>
-          <p:cNvPr id="2" name="Slide Image Placeholder 1"/>
-          <p:cNvSpPr>
-            <a:spLocks noGrp="1" noRot="1" noChangeAspect="1"/>
-          </p:cNvSpPr>
-          <p:nvPr>
-            <p:ph type="sldImg"/>
-          </p:nvPr>
-        </p:nvSpPr>
-        <p:spPr/>
-      </p:sp>
-      <p:sp>
-        <p:nvSpPr>
-          <p:cNvPr id="3" name="Notes Placeholder 2"/>
-          <p:cNvSpPr>
-            <a:spLocks noGrp="1"/>
-          </p:cNvSpPr>
-          <p:nvPr>
-            <p:ph type="body" idx="1"/>
-          </p:nvPr>
-        </p:nvSpPr>
-        <p:spPr/>
-        <p:txBody>
-          <a:bodyPr/>
-          <a:lstStyle/>
-          <a:p>
-            <a:endParaRPr lang="en-US" dirty="0"/>
-          </a:p>
-        </p:txBody>
-      </p:sp>
-      <p:sp>
-        <p:nvSpPr>
-          <p:cNvPr id="4" name="Slide Number Placeholder 3"/>
-          <p:cNvSpPr>
-            <a:spLocks noGrp="1"/>
-          </p:cNvSpPr>
-          <p:nvPr>
-            <p:ph type="sldNum" sz="quarter" idx="10"/>
-          </p:nvPr>
-        </p:nvSpPr>
-        <p:spPr/>
-        <p:txBody>
-          <a:bodyPr/>
-          <a:lstStyle/>
-          <a:p>
-            <a:fld id="{F7021451-1387-4CA6-816F-3879F97B5CBC}" type="slidenum">
-              <a:rPr lang="en-US"/>
-              <a:t>16</a:t>
             </a:fld>
             <a:endParaRPr lang="en-US"/>
           </a:p>
@@ -2368,608 +2321,6 @@
 
 <file path=ppt/slides/slide10.xml><?xml version="1.0" encoding="utf-8"?>
 <p:sld xmlns:a="http://schemas.openxmlformats.org/drawingml/2006/main" xmlns:r="http://schemas.openxmlformats.org/officeDocument/2006/relationships" xmlns:p="http://schemas.openxmlformats.org/presentationml/2006/main">
-  <p:cSld name="Slide 10">
-    <p:bg>
-      <p:bgPr>
-        <a:solidFill>
-          <a:srgbClr val="F4F6FB"/>
-        </a:solidFill>
-        <a:effectLst/>
-      </p:bgPr>
-    </p:bg>
-    <p:spTree>
-      <p:nvGrpSpPr>
-        <p:cNvPr id="1" name=""/>
-        <p:cNvGrpSpPr/>
-        <p:nvPr/>
-      </p:nvGrpSpPr>
-      <p:grpSpPr>
-        <a:xfrm>
-          <a:off x="0" y="0"/>
-          <a:ext cx="0" cy="0"/>
-          <a:chOff x="0" y="0"/>
-          <a:chExt cx="0" cy="0"/>
-        </a:xfrm>
-      </p:grpSpPr>
-      <p:sp>
-        <p:nvSpPr>
-          <p:cNvPr id="2" name="Shape 0"/>
-          <p:cNvSpPr/>
-          <p:nvPr/>
-        </p:nvSpPr>
-        <p:spPr>
-          <a:xfrm>
-            <a:off x="0" y="0"/>
-            <a:ext cx="9144000" cy="640080"/>
-          </a:xfrm>
-          <a:prstGeom prst="rect">
-            <a:avLst/>
-          </a:prstGeom>
-          <a:solidFill>
-            <a:srgbClr val="0D1B4B"/>
-          </a:solidFill>
-          <a:ln w="12700">
-            <a:solidFill>
-              <a:srgbClr val="0D1B4B"/>
-            </a:solidFill>
-            <a:prstDash val="solid"/>
-          </a:ln>
-        </p:spPr>
-        <p:txBody>
-          <a:bodyPr/>
-          <a:lstStyle/>
-          <a:p>
-            <a:endParaRPr lang="en-US"/>
-          </a:p>
-        </p:txBody>
-      </p:sp>
-      <p:sp>
-        <p:nvSpPr>
-          <p:cNvPr id="3" name="Text 1"/>
-          <p:cNvSpPr/>
-          <p:nvPr/>
-        </p:nvSpPr>
-        <p:spPr>
-          <a:xfrm>
-            <a:off x="365760" y="73152"/>
-            <a:ext cx="8412480" cy="502920"/>
-          </a:xfrm>
-          <a:prstGeom prst="rect">
-            <a:avLst/>
-          </a:prstGeom>
-          <a:noFill/>
-          <a:ln/>
-        </p:spPr>
-        <p:txBody>
-          <a:bodyPr wrap="square" rtlCol="0" anchor="ctr"/>
-          <a:lstStyle/>
-          <a:p>
-            <a:pPr marL="0" indent="0">
-              <a:buNone/>
-            </a:pPr>
-            <a:r>
-              <a:rPr lang="en-US" sz="2400" b="1" dirty="0">
-                <a:solidFill>
-                  <a:srgbClr val="FFFFFF"/>
-                </a:solidFill>
-                <a:latin typeface="Georgia" pitchFamily="34" charset="0"/>
-                <a:ea typeface="Georgia" pitchFamily="34" charset="-122"/>
-                <a:cs typeface="Georgia" pitchFamily="34" charset="-120"/>
-              </a:rPr>
-              <a:t>Finding 3b: NIL Era vs. Pre-NIL Upset Rates</a:t>
-            </a:r>
-            <a:endParaRPr lang="en-US" sz="2400" dirty="0"/>
-          </a:p>
-        </p:txBody>
-      </p:sp>
-      <p:pic>
-        <p:nvPicPr>
-          <p:cNvPr id="4" name="Image 0" descr="preencoded.png"/>
-          <p:cNvPicPr>
-            <a:picLocks noChangeAspect="1"/>
-          </p:cNvPicPr>
-          <p:nvPr/>
-        </p:nvPicPr>
-        <p:blipFill>
-          <a:blip r:embed="rId3"/>
-          <a:stretch>
-            <a:fillRect/>
-          </a:stretch>
-        </p:blipFill>
-        <p:spPr>
-          <a:xfrm>
-            <a:off x="274320" y="749808"/>
-            <a:ext cx="4114800" cy="3200400"/>
-          </a:xfrm>
-          <a:prstGeom prst="rect">
-            <a:avLst/>
-          </a:prstGeom>
-        </p:spPr>
-      </p:pic>
-      <p:pic>
-        <p:nvPicPr>
-          <p:cNvPr id="5" name="Image 1" descr="preencoded.png"/>
-          <p:cNvPicPr>
-            <a:picLocks noChangeAspect="1"/>
-          </p:cNvPicPr>
-          <p:nvPr/>
-        </p:nvPicPr>
-        <p:blipFill>
-          <a:blip r:embed="rId4"/>
-          <a:stretch>
-            <a:fillRect/>
-          </a:stretch>
-        </p:blipFill>
-        <p:spPr>
-          <a:xfrm>
-            <a:off x="4572000" y="749808"/>
-            <a:ext cx="4343400" cy="3200400"/>
-          </a:xfrm>
-          <a:prstGeom prst="rect">
-            <a:avLst/>
-          </a:prstGeom>
-        </p:spPr>
-      </p:pic>
-      <p:sp>
-        <p:nvSpPr>
-          <p:cNvPr id="6" name="Text 2"/>
-          <p:cNvSpPr/>
-          <p:nvPr/>
-        </p:nvSpPr>
-        <p:spPr>
-          <a:xfrm>
-            <a:off x="274320" y="4005072"/>
-            <a:ext cx="4114800" cy="274320"/>
-          </a:xfrm>
-          <a:prstGeom prst="rect">
-            <a:avLst/>
-          </a:prstGeom>
-          <a:noFill/>
-          <a:ln/>
-        </p:spPr>
-        <p:txBody>
-          <a:bodyPr wrap="square" rtlCol="0" anchor="ctr"/>
-          <a:lstStyle/>
-          <a:p>
-            <a:pPr marL="0" indent="0" algn="ctr">
-              <a:buNone/>
-            </a:pPr>
-            <a:r>
-              <a:rPr lang="en-US" sz="1000" b="1" dirty="0">
-                <a:solidFill>
-                  <a:srgbClr val="0D1B4B"/>
-                </a:solidFill>
-                <a:latin typeface="Calibri" pitchFamily="34" charset="0"/>
-                <a:ea typeface="Calibri" pitchFamily="34" charset="-122"/>
-                <a:cs typeface="Calibri" pitchFamily="34" charset="-120"/>
-              </a:rPr>
-              <a:t>Overall (1985–2024)</a:t>
-            </a:r>
-            <a:endParaRPr lang="en-US" sz="1000" dirty="0"/>
-          </a:p>
-        </p:txBody>
-      </p:sp>
-      <p:sp>
-        <p:nvSpPr>
-          <p:cNvPr id="7" name="Text 3"/>
-          <p:cNvSpPr/>
-          <p:nvPr/>
-        </p:nvSpPr>
-        <p:spPr>
-          <a:xfrm>
-            <a:off x="4572000" y="4005072"/>
-            <a:ext cx="4343400" cy="274320"/>
-          </a:xfrm>
-          <a:prstGeom prst="rect">
-            <a:avLst/>
-          </a:prstGeom>
-          <a:noFill/>
-          <a:ln/>
-        </p:spPr>
-        <p:txBody>
-          <a:bodyPr wrap="square" rtlCol="0" anchor="ctr"/>
-          <a:lstStyle/>
-          <a:p>
-            <a:pPr marL="0" indent="0" algn="ctr">
-              <a:buNone/>
-            </a:pPr>
-            <a:r>
-              <a:rPr lang="en-US" sz="1000" b="1" dirty="0">
-                <a:solidFill>
-                  <a:srgbClr val="0D1B4B"/>
-                </a:solidFill>
-                <a:latin typeface="Calibri" pitchFamily="34" charset="0"/>
-                <a:ea typeface="Calibri" pitchFamily="34" charset="-122"/>
-                <a:cs typeface="Calibri" pitchFamily="34" charset="-120"/>
-              </a:rPr>
-              <a:t>By Round</a:t>
-            </a:r>
-            <a:endParaRPr lang="en-US" sz="1000" dirty="0"/>
-          </a:p>
-        </p:txBody>
-      </p:sp>
-      <p:sp>
-        <p:nvSpPr>
-          <p:cNvPr id="8" name="Shape 4"/>
-          <p:cNvSpPr/>
-          <p:nvPr/>
-        </p:nvSpPr>
-        <p:spPr>
-          <a:xfrm>
-            <a:off x="274320" y="4343400"/>
-            <a:ext cx="8595360" cy="640080"/>
-          </a:xfrm>
-          <a:prstGeom prst="rect">
-            <a:avLst/>
-          </a:prstGeom>
-          <a:solidFill>
-            <a:srgbClr val="FFFFFF"/>
-          </a:solidFill>
-          <a:ln w="6350">
-            <a:solidFill>
-              <a:srgbClr val="D8DEE8"/>
-            </a:solidFill>
-            <a:prstDash val="solid"/>
-          </a:ln>
-        </p:spPr>
-        <p:txBody>
-          <a:bodyPr/>
-          <a:lstStyle/>
-          <a:p>
-            <a:endParaRPr lang="en-US"/>
-          </a:p>
-        </p:txBody>
-      </p:sp>
-      <p:sp>
-        <p:nvSpPr>
-          <p:cNvPr id="9" name="Text 5"/>
-          <p:cNvSpPr/>
-          <p:nvPr/>
-        </p:nvSpPr>
-        <p:spPr>
-          <a:xfrm>
-            <a:off x="457200" y="4370832"/>
-            <a:ext cx="8229600" cy="548640"/>
-          </a:xfrm>
-          <a:prstGeom prst="rect">
-            <a:avLst/>
-          </a:prstGeom>
-          <a:noFill/>
-          <a:ln/>
-        </p:spPr>
-        <p:txBody>
-          <a:bodyPr wrap="square" rtlCol="0" anchor="ctr"/>
-          <a:lstStyle/>
-          <a:p>
-            <a:pPr marL="0" indent="0" algn="l">
-              <a:buNone/>
-            </a:pPr>
-            <a:r>
-              <a:rPr lang="en-US" sz="1050" dirty="0">
-                <a:solidFill>
-                  <a:srgbClr val="1E293B"/>
-                </a:solidFill>
-                <a:latin typeface="Calibri" pitchFamily="34" charset="0"/>
-                <a:ea typeface="Calibri" pitchFamily="34" charset="-122"/>
-                <a:cs typeface="Calibri" pitchFamily="34" charset="-120"/>
-              </a:rPr>
-              <a:t>NIL Era (2022+): 21.5% upset rate vs. Pre-NIL (1985–2021): 28.5%.  The NIL era shows lower upset rates across nearly every round — top programs may be better at retaining star talent.</a:t>
-            </a:r>
-            <a:endParaRPr lang="en-US" sz="1050" dirty="0"/>
-          </a:p>
-        </p:txBody>
-      </p:sp>
-    </p:spTree>
-  </p:cSld>
-  <p:clrMapOvr>
-    <a:masterClrMapping/>
-  </p:clrMapOvr>
-</p:sld>
-</file>
-
-<file path=ppt/slides/slide11.xml><?xml version="1.0" encoding="utf-8"?>
-<p:sld xmlns:a="http://schemas.openxmlformats.org/drawingml/2006/main" xmlns:r="http://schemas.openxmlformats.org/officeDocument/2006/relationships" xmlns:p="http://schemas.openxmlformats.org/presentationml/2006/main">
-  <p:cSld name="Slide 11">
-    <p:bg>
-      <p:bgPr>
-        <a:solidFill>
-          <a:srgbClr val="F4F6FB"/>
-        </a:solidFill>
-        <a:effectLst/>
-      </p:bgPr>
-    </p:bg>
-    <p:spTree>
-      <p:nvGrpSpPr>
-        <p:cNvPr id="1" name=""/>
-        <p:cNvGrpSpPr/>
-        <p:nvPr/>
-      </p:nvGrpSpPr>
-      <p:grpSpPr>
-        <a:xfrm>
-          <a:off x="0" y="0"/>
-          <a:ext cx="0" cy="0"/>
-          <a:chOff x="0" y="0"/>
-          <a:chExt cx="0" cy="0"/>
-        </a:xfrm>
-      </p:grpSpPr>
-      <p:sp>
-        <p:nvSpPr>
-          <p:cNvPr id="2" name="Shape 0"/>
-          <p:cNvSpPr/>
-          <p:nvPr/>
-        </p:nvSpPr>
-        <p:spPr>
-          <a:xfrm>
-            <a:off x="0" y="0"/>
-            <a:ext cx="9144000" cy="640080"/>
-          </a:xfrm>
-          <a:prstGeom prst="rect">
-            <a:avLst/>
-          </a:prstGeom>
-          <a:solidFill>
-            <a:srgbClr val="0D1B4B"/>
-          </a:solidFill>
-          <a:ln w="12700">
-            <a:solidFill>
-              <a:srgbClr val="0D1B4B"/>
-            </a:solidFill>
-            <a:prstDash val="solid"/>
-          </a:ln>
-        </p:spPr>
-        <p:txBody>
-          <a:bodyPr/>
-          <a:lstStyle/>
-          <a:p>
-            <a:endParaRPr lang="en-US"/>
-          </a:p>
-        </p:txBody>
-      </p:sp>
-      <p:sp>
-        <p:nvSpPr>
-          <p:cNvPr id="3" name="Text 1"/>
-          <p:cNvSpPr/>
-          <p:nvPr/>
-        </p:nvSpPr>
-        <p:spPr>
-          <a:xfrm>
-            <a:off x="365760" y="73152"/>
-            <a:ext cx="8412480" cy="502920"/>
-          </a:xfrm>
-          <a:prstGeom prst="rect">
-            <a:avLst/>
-          </a:prstGeom>
-          <a:noFill/>
-          <a:ln/>
-        </p:spPr>
-        <p:txBody>
-          <a:bodyPr wrap="square" rtlCol="0" anchor="ctr"/>
-          <a:lstStyle/>
-          <a:p>
-            <a:pPr marL="0" indent="0">
-              <a:buNone/>
-            </a:pPr>
-            <a:r>
-              <a:rPr lang="en-US" sz="2400" b="1" dirty="0">
-                <a:solidFill>
-                  <a:srgbClr val="FFFFFF"/>
-                </a:solidFill>
-                <a:latin typeface="Georgia" pitchFamily="34" charset="0"/>
-                <a:ea typeface="Georgia" pitchFamily="34" charset="-122"/>
-                <a:cs typeface="Georgia" pitchFamily="34" charset="-120"/>
-              </a:rPr>
-              <a:t>Finding 3c: Upset Trends — Decade View &amp; Long-Run History</a:t>
-            </a:r>
-            <a:endParaRPr lang="en-US" sz="2400" dirty="0"/>
-          </a:p>
-        </p:txBody>
-      </p:sp>
-      <p:pic>
-        <p:nvPicPr>
-          <p:cNvPr id="4" name="Image 0" descr="preencoded.png"/>
-          <p:cNvPicPr>
-            <a:picLocks noChangeAspect="1"/>
-          </p:cNvPicPr>
-          <p:nvPr/>
-        </p:nvPicPr>
-        <p:blipFill>
-          <a:blip r:embed="rId3"/>
-          <a:stretch>
-            <a:fillRect/>
-          </a:stretch>
-        </p:blipFill>
-        <p:spPr>
-          <a:xfrm>
-            <a:off x="274320" y="749808"/>
-            <a:ext cx="4114800" cy="3200400"/>
-          </a:xfrm>
-          <a:prstGeom prst="rect">
-            <a:avLst/>
-          </a:prstGeom>
-        </p:spPr>
-      </p:pic>
-      <p:pic>
-        <p:nvPicPr>
-          <p:cNvPr id="5" name="Image 1" descr="preencoded.png"/>
-          <p:cNvPicPr>
-            <a:picLocks noChangeAspect="1"/>
-          </p:cNvPicPr>
-          <p:nvPr/>
-        </p:nvPicPr>
-        <p:blipFill>
-          <a:blip r:embed="rId4"/>
-          <a:stretch>
-            <a:fillRect/>
-          </a:stretch>
-        </p:blipFill>
-        <p:spPr>
-          <a:xfrm>
-            <a:off x="4572000" y="749808"/>
-            <a:ext cx="4343400" cy="3200400"/>
-          </a:xfrm>
-          <a:prstGeom prst="rect">
-            <a:avLst/>
-          </a:prstGeom>
-        </p:spPr>
-      </p:pic>
-      <p:sp>
-        <p:nvSpPr>
-          <p:cNvPr id="6" name="Text 2"/>
-          <p:cNvSpPr/>
-          <p:nvPr/>
-        </p:nvSpPr>
-        <p:spPr>
-          <a:xfrm>
-            <a:off x="274320" y="4005072"/>
-            <a:ext cx="4114800" cy="274320"/>
-          </a:xfrm>
-          <a:prstGeom prst="rect">
-            <a:avLst/>
-          </a:prstGeom>
-          <a:noFill/>
-          <a:ln/>
-        </p:spPr>
-        <p:txBody>
-          <a:bodyPr wrap="square" rtlCol="0" anchor="ctr"/>
-          <a:lstStyle/>
-          <a:p>
-            <a:pPr marL="0" indent="0" algn="ctr">
-              <a:buNone/>
-            </a:pPr>
-            <a:r>
-              <a:rPr lang="en-US" sz="1000" b="1" dirty="0">
-                <a:solidFill>
-                  <a:srgbClr val="0D1B4B"/>
-                </a:solidFill>
-                <a:latin typeface="Calibri" pitchFamily="34" charset="0"/>
-                <a:ea typeface="Calibri" pitchFamily="34" charset="-122"/>
-                <a:cs typeface="Calibri" pitchFamily="34" charset="-120"/>
-              </a:rPr>
-              <a:t>Upset Rate by Decade (1985–2024)</a:t>
-            </a:r>
-            <a:endParaRPr lang="en-US" sz="1000" dirty="0"/>
-          </a:p>
-        </p:txBody>
-      </p:sp>
-      <p:sp>
-        <p:nvSpPr>
-          <p:cNvPr id="7" name="Text 3"/>
-          <p:cNvSpPr/>
-          <p:nvPr/>
-        </p:nvSpPr>
-        <p:spPr>
-          <a:xfrm>
-            <a:off x="4572000" y="4005072"/>
-            <a:ext cx="4343400" cy="274320"/>
-          </a:xfrm>
-          <a:prstGeom prst="rect">
-            <a:avLst/>
-          </a:prstGeom>
-          <a:noFill/>
-          <a:ln/>
-        </p:spPr>
-        <p:txBody>
-          <a:bodyPr wrap="square" rtlCol="0" anchor="ctr"/>
-          <a:lstStyle/>
-          <a:p>
-            <a:pPr marL="0" indent="0" algn="ctr">
-              <a:buNone/>
-            </a:pPr>
-            <a:r>
-              <a:rPr lang="en-US" sz="1000" b="1" dirty="0">
-                <a:solidFill>
-                  <a:srgbClr val="0D1B4B"/>
-                </a:solidFill>
-                <a:latin typeface="Calibri" pitchFamily="34" charset="0"/>
-                <a:ea typeface="Calibri" pitchFamily="34" charset="-122"/>
-                <a:cs typeface="Calibri" pitchFamily="34" charset="-120"/>
-              </a:rPr>
-              <a:t>Annual Trend with LOESS Smoothing</a:t>
-            </a:r>
-            <a:endParaRPr lang="en-US" sz="1000" dirty="0"/>
-          </a:p>
-        </p:txBody>
-      </p:sp>
-      <p:sp>
-        <p:nvSpPr>
-          <p:cNvPr id="8" name="Shape 4"/>
-          <p:cNvSpPr/>
-          <p:nvPr/>
-        </p:nvSpPr>
-        <p:spPr>
-          <a:xfrm>
-            <a:off x="274320" y="4343400"/>
-            <a:ext cx="8595360" cy="640080"/>
-          </a:xfrm>
-          <a:prstGeom prst="rect">
-            <a:avLst/>
-          </a:prstGeom>
-          <a:solidFill>
-            <a:srgbClr val="FFFFFF"/>
-          </a:solidFill>
-          <a:ln w="6350">
-            <a:solidFill>
-              <a:srgbClr val="D8DEE8"/>
-            </a:solidFill>
-            <a:prstDash val="solid"/>
-          </a:ln>
-        </p:spPr>
-        <p:txBody>
-          <a:bodyPr/>
-          <a:lstStyle/>
-          <a:p>
-            <a:endParaRPr lang="en-US"/>
-          </a:p>
-        </p:txBody>
-      </p:sp>
-      <p:sp>
-        <p:nvSpPr>
-          <p:cNvPr id="9" name="Text 5"/>
-          <p:cNvSpPr/>
-          <p:nvPr/>
-        </p:nvSpPr>
-        <p:spPr>
-          <a:xfrm>
-            <a:off x="457200" y="4370832"/>
-            <a:ext cx="8229600" cy="548640"/>
-          </a:xfrm>
-          <a:prstGeom prst="rect">
-            <a:avLst/>
-          </a:prstGeom>
-          <a:noFill/>
-          <a:ln/>
-        </p:spPr>
-        <p:txBody>
-          <a:bodyPr wrap="square" rtlCol="0" anchor="ctr"/>
-          <a:lstStyle/>
-          <a:p>
-            <a:pPr marL="0" indent="0">
-              <a:buNone/>
-            </a:pPr>
-            <a:r>
-              <a:rPr lang="en-US" sz="1050" dirty="0">
-                <a:solidFill>
-                  <a:srgbClr val="1E293B"/>
-                </a:solidFill>
-                <a:latin typeface="Calibri" pitchFamily="34" charset="0"/>
-                <a:ea typeface="Calibri" pitchFamily="34" charset="-122"/>
-                <a:cs typeface="Calibri" pitchFamily="34" charset="-120"/>
-              </a:rPr>
-              <a:t>The 2010s were the most chaotic decade (29.4%). The 2000s and 2020s were similar (~23%). Long-run LOESS trend shows an uptick mid-decade followed by a sharp recent decline.</a:t>
-            </a:r>
-            <a:endParaRPr lang="en-US" sz="1050" dirty="0"/>
-          </a:p>
-        </p:txBody>
-      </p:sp>
-    </p:spTree>
-  </p:cSld>
-  <p:clrMapOvr>
-    <a:masterClrMapping/>
-  </p:clrMapOvr>
-</p:sld>
-</file>
-
-<file path=ppt/slides/slide12.xml><?xml version="1.0" encoding="utf-8"?>
-<p:sld xmlns:a="http://schemas.openxmlformats.org/drawingml/2006/main" xmlns:r="http://schemas.openxmlformats.org/officeDocument/2006/relationships" xmlns:p="http://schemas.openxmlformats.org/presentationml/2006/main">
   <p:cSld name="Slide 12">
     <p:bg>
       <p:bgPr>
@@ -3763,7 +3114,7 @@
 </p:sld>
 </file>
 
-<file path=ppt/slides/slide13.xml><?xml version="1.0" encoding="utf-8"?>
+<file path=ppt/slides/slide11.xml><?xml version="1.0" encoding="utf-8"?>
 <p:sld xmlns:a="http://schemas.openxmlformats.org/drawingml/2006/main" xmlns:r="http://schemas.openxmlformats.org/officeDocument/2006/relationships" xmlns:p="http://schemas.openxmlformats.org/presentationml/2006/main">
   <p:cSld name="Slide 13">
     <p:bg>
@@ -3993,237 +3344,7 @@
 </p:sld>
 </file>
 
-<file path=ppt/slides/slide14.xml><?xml version="1.0" encoding="utf-8"?>
-<p:sld xmlns:a="http://schemas.openxmlformats.org/drawingml/2006/main" xmlns:r="http://schemas.openxmlformats.org/officeDocument/2006/relationships" xmlns:p="http://schemas.openxmlformats.org/presentationml/2006/main">
-  <p:cSld name="Slide 14">
-    <p:bg>
-      <p:bgPr>
-        <a:solidFill>
-          <a:srgbClr val="F4F6FB"/>
-        </a:solidFill>
-        <a:effectLst/>
-      </p:bgPr>
-    </p:bg>
-    <p:spTree>
-      <p:nvGrpSpPr>
-        <p:cNvPr id="1" name=""/>
-        <p:cNvGrpSpPr/>
-        <p:nvPr/>
-      </p:nvGrpSpPr>
-      <p:grpSpPr>
-        <a:xfrm>
-          <a:off x="0" y="0"/>
-          <a:ext cx="0" cy="0"/>
-          <a:chOff x="0" y="0"/>
-          <a:chExt cx="0" cy="0"/>
-        </a:xfrm>
-      </p:grpSpPr>
-      <p:sp>
-        <p:nvSpPr>
-          <p:cNvPr id="2" name="Shape 0"/>
-          <p:cNvSpPr/>
-          <p:nvPr/>
-        </p:nvSpPr>
-        <p:spPr>
-          <a:xfrm>
-            <a:off x="0" y="0"/>
-            <a:ext cx="9144000" cy="640080"/>
-          </a:xfrm>
-          <a:prstGeom prst="rect">
-            <a:avLst/>
-          </a:prstGeom>
-          <a:solidFill>
-            <a:srgbClr val="0D1B4B"/>
-          </a:solidFill>
-          <a:ln w="12700">
-            <a:solidFill>
-              <a:srgbClr val="0D1B4B"/>
-            </a:solidFill>
-            <a:prstDash val="solid"/>
-          </a:ln>
-        </p:spPr>
-        <p:txBody>
-          <a:bodyPr/>
-          <a:lstStyle/>
-          <a:p>
-            <a:endParaRPr lang="en-US"/>
-          </a:p>
-        </p:txBody>
-      </p:sp>
-      <p:sp>
-        <p:nvSpPr>
-          <p:cNvPr id="3" name="Text 1"/>
-          <p:cNvSpPr/>
-          <p:nvPr/>
-        </p:nvSpPr>
-        <p:spPr>
-          <a:xfrm>
-            <a:off x="365760" y="73152"/>
-            <a:ext cx="8412480" cy="502920"/>
-          </a:xfrm>
-          <a:prstGeom prst="rect">
-            <a:avLst/>
-          </a:prstGeom>
-          <a:noFill/>
-          <a:ln/>
-        </p:spPr>
-        <p:txBody>
-          <a:bodyPr wrap="square" rtlCol="0" anchor="ctr"/>
-          <a:lstStyle/>
-          <a:p>
-            <a:pPr marL="0" indent="0">
-              <a:buNone/>
-            </a:pPr>
-            <a:r>
-              <a:rPr lang="en-US" sz="2400" b="1" dirty="0">
-                <a:solidFill>
-                  <a:srgbClr val="FFFFFF"/>
-                </a:solidFill>
-                <a:latin typeface="Georgia" pitchFamily="34" charset="0"/>
-                <a:ea typeface="Georgia" pitchFamily="34" charset="-122"/>
-                <a:cs typeface="Georgia" pitchFamily="34" charset="-120"/>
-              </a:rPr>
-              <a:t>Upset-Prone Matchups &amp; Deep Tournament Runs (1985–2024)</a:t>
-            </a:r>
-            <a:endParaRPr lang="en-US" sz="2400" dirty="0"/>
-          </a:p>
-        </p:txBody>
-      </p:sp>
-      <p:pic>
-        <p:nvPicPr>
-          <p:cNvPr id="4" name="Image 0" descr="preencoded.png"/>
-          <p:cNvPicPr>
-            <a:picLocks noChangeAspect="1"/>
-          </p:cNvPicPr>
-          <p:nvPr/>
-        </p:nvPicPr>
-        <p:blipFill>
-          <a:blip r:embed="rId3"/>
-          <a:stretch>
-            <a:fillRect/>
-          </a:stretch>
-        </p:blipFill>
-        <p:spPr>
-          <a:xfrm>
-            <a:off x="274320" y="749808"/>
-            <a:ext cx="4251960" cy="4114800"/>
-          </a:xfrm>
-          <a:prstGeom prst="rect">
-            <a:avLst/>
-          </a:prstGeom>
-        </p:spPr>
-      </p:pic>
-      <p:pic>
-        <p:nvPicPr>
-          <p:cNvPr id="5" name="Image 1" descr="preencoded.png"/>
-          <p:cNvPicPr>
-            <a:picLocks noChangeAspect="1"/>
-          </p:cNvPicPr>
-          <p:nvPr/>
-        </p:nvPicPr>
-        <p:blipFill>
-          <a:blip r:embed="rId4"/>
-          <a:stretch>
-            <a:fillRect/>
-          </a:stretch>
-        </p:blipFill>
-        <p:spPr>
-          <a:xfrm>
-            <a:off x="4709160" y="749808"/>
-            <a:ext cx="4160520" cy="4114800"/>
-          </a:xfrm>
-          <a:prstGeom prst="rect">
-            <a:avLst/>
-          </a:prstGeom>
-        </p:spPr>
-      </p:pic>
-      <p:sp>
-        <p:nvSpPr>
-          <p:cNvPr id="6" name="Text 2"/>
-          <p:cNvSpPr/>
-          <p:nvPr/>
-        </p:nvSpPr>
-        <p:spPr>
-          <a:xfrm>
-            <a:off x="274320" y="4754880"/>
-            <a:ext cx="4251960" cy="274320"/>
-          </a:xfrm>
-          <a:prstGeom prst="rect">
-            <a:avLst/>
-          </a:prstGeom>
-          <a:noFill/>
-          <a:ln/>
-        </p:spPr>
-        <p:txBody>
-          <a:bodyPr wrap="square" rtlCol="0" anchor="ctr"/>
-          <a:lstStyle/>
-          <a:p>
-            <a:pPr marL="0" indent="0">
-              <a:buNone/>
-            </a:pPr>
-            <a:r>
-              <a:rPr lang="en-US" sz="950" i="1" dirty="0">
-                <a:solidFill>
-                  <a:srgbClr val="64748B"/>
-                </a:solidFill>
-                <a:latin typeface="Calibri" pitchFamily="34" charset="0"/>
-                <a:ea typeface="Calibri" pitchFamily="34" charset="-122"/>
-                <a:cs typeface="Calibri" pitchFamily="34" charset="-120"/>
-              </a:rPr>
-              <a:t>7 vs 15 matchup has the highest all-time upset rate (80%) — small sample but remarkable. 4 vs 8 and 8 vs 9 follow.</a:t>
-            </a:r>
-            <a:endParaRPr lang="en-US" sz="950" dirty="0"/>
-          </a:p>
-        </p:txBody>
-      </p:sp>
-      <p:sp>
-        <p:nvSpPr>
-          <p:cNvPr id="7" name="Text 3"/>
-          <p:cNvSpPr/>
-          <p:nvPr/>
-        </p:nvSpPr>
-        <p:spPr>
-          <a:xfrm>
-            <a:off x="4709160" y="4754880"/>
-            <a:ext cx="4160520" cy="274320"/>
-          </a:xfrm>
-          <a:prstGeom prst="rect">
-            <a:avLst/>
-          </a:prstGeom>
-          <a:noFill/>
-          <a:ln/>
-        </p:spPr>
-        <p:txBody>
-          <a:bodyPr wrap="square" rtlCol="0" anchor="ctr"/>
-          <a:lstStyle/>
-          <a:p>
-            <a:pPr marL="0" indent="0">
-              <a:buNone/>
-            </a:pPr>
-            <a:r>
-              <a:rPr lang="en-US" sz="950" i="1" dirty="0">
-                <a:solidFill>
-                  <a:srgbClr val="64748B"/>
-                </a:solidFill>
-                <a:latin typeface="Calibri" pitchFamily="34" charset="0"/>
-                <a:ea typeface="Calibri" pitchFamily="34" charset="-122"/>
-                <a:cs typeface="Calibri" pitchFamily="34" charset="-120"/>
-              </a:rPr>
-              <a:t>Seed 1 teams account for 50 Sweet 16 appearances and 13 championships. No seed above 11 has made the Championship.</a:t>
-            </a:r>
-            <a:endParaRPr lang="en-US" sz="950" dirty="0"/>
-          </a:p>
-        </p:txBody>
-      </p:sp>
-    </p:spTree>
-  </p:cSld>
-  <p:clrMapOvr>
-    <a:masterClrMapping/>
-  </p:clrMapOvr>
-</p:sld>
-</file>
-
-<file path=ppt/slides/slide15.xml><?xml version="1.0" encoding="utf-8"?>
+<file path=ppt/slides/slide12.xml><?xml version="1.0" encoding="utf-8"?>
 <p:sld xmlns:a="http://schemas.openxmlformats.org/drawingml/2006/main" xmlns:r="http://schemas.openxmlformats.org/officeDocument/2006/relationships" xmlns:p="http://schemas.openxmlformats.org/presentationml/2006/main">
   <p:cSld name="Slide 15">
     <p:bg>
@@ -5462,7 +4583,7 @@
 </p:sld>
 </file>
 
-<file path=ppt/slides/slide16.xml><?xml version="1.0" encoding="utf-8"?>
+<file path=ppt/slides/slide13.xml><?xml version="1.0" encoding="utf-8"?>
 <p:sld xmlns:a="http://schemas.openxmlformats.org/drawingml/2006/main" xmlns:r="http://schemas.openxmlformats.org/officeDocument/2006/relationships" xmlns:p="http://schemas.openxmlformats.org/presentationml/2006/main">
   <p:cSld name="Slide 16">
     <p:bg>
@@ -9581,7 +8702,7 @@
         <p:spPr>
           <a:xfrm>
             <a:off x="274320" y="749808"/>
-            <a:ext cx="8595360" cy="4069080"/>
+            <a:ext cx="8417504" cy="4069080"/>
           </a:xfrm>
           <a:prstGeom prst="rect">
             <a:avLst/>
@@ -10439,7 +9560,7 @@
         </p:blipFill>
         <p:spPr>
           <a:xfrm>
-            <a:off x="274320" y="749808"/>
+            <a:off x="274320" y="754832"/>
             <a:ext cx="6126480" cy="4114800"/>
           </a:xfrm>
           <a:prstGeom prst="rect">
@@ -11421,489 +10542,6 @@
 </file>
 
 <file path=ppt/slides/slide8.xml><?xml version="1.0" encoding="utf-8"?>
-<p:sld xmlns:a="http://schemas.openxmlformats.org/drawingml/2006/main" xmlns:r="http://schemas.openxmlformats.org/officeDocument/2006/relationships" xmlns:p="http://schemas.openxmlformats.org/presentationml/2006/main">
-  <p:cSld name="Slide 8">
-    <p:bg>
-      <p:bgPr>
-        <a:solidFill>
-          <a:srgbClr val="F4F6FB"/>
-        </a:solidFill>
-        <a:effectLst/>
-      </p:bgPr>
-    </p:bg>
-    <p:spTree>
-      <p:nvGrpSpPr>
-        <p:cNvPr id="1" name=""/>
-        <p:cNvGrpSpPr/>
-        <p:nvPr/>
-      </p:nvGrpSpPr>
-      <p:grpSpPr>
-        <a:xfrm>
-          <a:off x="0" y="0"/>
-          <a:ext cx="0" cy="0"/>
-          <a:chOff x="0" y="0"/>
-          <a:chExt cx="0" cy="0"/>
-        </a:xfrm>
-      </p:grpSpPr>
-      <p:sp>
-        <p:nvSpPr>
-          <p:cNvPr id="2" name="Shape 0"/>
-          <p:cNvSpPr/>
-          <p:nvPr/>
-        </p:nvSpPr>
-        <p:spPr>
-          <a:xfrm>
-            <a:off x="0" y="0"/>
-            <a:ext cx="9144000" cy="640080"/>
-          </a:xfrm>
-          <a:prstGeom prst="rect">
-            <a:avLst/>
-          </a:prstGeom>
-          <a:solidFill>
-            <a:srgbClr val="0D1B4B"/>
-          </a:solidFill>
-          <a:ln w="12700">
-            <a:solidFill>
-              <a:srgbClr val="0D1B4B"/>
-            </a:solidFill>
-            <a:prstDash val="solid"/>
-          </a:ln>
-        </p:spPr>
-        <p:txBody>
-          <a:bodyPr/>
-          <a:lstStyle/>
-          <a:p>
-            <a:endParaRPr lang="en-US"/>
-          </a:p>
-        </p:txBody>
-      </p:sp>
-      <p:sp>
-        <p:nvSpPr>
-          <p:cNvPr id="3" name="Text 1"/>
-          <p:cNvSpPr/>
-          <p:nvPr/>
-        </p:nvSpPr>
-        <p:spPr>
-          <a:xfrm>
-            <a:off x="365760" y="73152"/>
-            <a:ext cx="8412480" cy="502920"/>
-          </a:xfrm>
-          <a:prstGeom prst="rect">
-            <a:avLst/>
-          </a:prstGeom>
-          <a:noFill/>
-          <a:ln/>
-        </p:spPr>
-        <p:txBody>
-          <a:bodyPr wrap="square" rtlCol="0" anchor="ctr"/>
-          <a:lstStyle/>
-          <a:p>
-            <a:pPr marL="0" indent="0">
-              <a:buNone/>
-            </a:pPr>
-            <a:r>
-              <a:rPr lang="en-US" sz="2400" b="1" dirty="0">
-                <a:solidFill>
-                  <a:srgbClr val="FFFFFF"/>
-                </a:solidFill>
-                <a:latin typeface="Georgia" pitchFamily="34" charset="0"/>
-                <a:ea typeface="Georgia" pitchFamily="34" charset="-122"/>
-                <a:cs typeface="Georgia" pitchFamily="34" charset="-120"/>
-              </a:rPr>
-              <a:t>Finding 2c: Share of Round Wins by Seed</a:t>
-            </a:r>
-            <a:endParaRPr lang="en-US" sz="2400" dirty="0"/>
-          </a:p>
-        </p:txBody>
-      </p:sp>
-      <p:pic>
-        <p:nvPicPr>
-          <p:cNvPr id="4" name="Image 0" descr="preencoded.png"/>
-          <p:cNvPicPr>
-            <a:picLocks noChangeAspect="1"/>
-          </p:cNvPicPr>
-          <p:nvPr/>
-        </p:nvPicPr>
-        <p:blipFill>
-          <a:blip r:embed="rId3"/>
-          <a:stretch>
-            <a:fillRect/>
-          </a:stretch>
-        </p:blipFill>
-        <p:spPr>
-          <a:xfrm>
-            <a:off x="274320" y="749808"/>
-            <a:ext cx="6126480" cy="4114800"/>
-          </a:xfrm>
-          <a:prstGeom prst="rect">
-            <a:avLst/>
-          </a:prstGeom>
-        </p:spPr>
-      </p:pic>
-      <p:sp>
-        <p:nvSpPr>
-          <p:cNvPr id="5" name="Shape 2"/>
-          <p:cNvSpPr/>
-          <p:nvPr/>
-        </p:nvSpPr>
-        <p:spPr>
-          <a:xfrm>
-            <a:off x="6583680" y="749808"/>
-            <a:ext cx="2331720" cy="4114800"/>
-          </a:xfrm>
-          <a:prstGeom prst="rect">
-            <a:avLst/>
-          </a:prstGeom>
-          <a:solidFill>
-            <a:srgbClr val="FFFFFF"/>
-          </a:solidFill>
-          <a:ln w="6350">
-            <a:solidFill>
-              <a:srgbClr val="D8DEE8"/>
-            </a:solidFill>
-            <a:prstDash val="solid"/>
-          </a:ln>
-        </p:spPr>
-        <p:txBody>
-          <a:bodyPr/>
-          <a:lstStyle/>
-          <a:p>
-            <a:endParaRPr lang="en-US"/>
-          </a:p>
-        </p:txBody>
-      </p:sp>
-      <p:sp>
-        <p:nvSpPr>
-          <p:cNvPr id="6" name="Text 3"/>
-          <p:cNvSpPr/>
-          <p:nvPr/>
-        </p:nvSpPr>
-        <p:spPr>
-          <a:xfrm>
-            <a:off x="6675120" y="822960"/>
-            <a:ext cx="2148840" cy="347472"/>
-          </a:xfrm>
-          <a:prstGeom prst="rect">
-            <a:avLst/>
-          </a:prstGeom>
-          <a:noFill/>
-          <a:ln/>
-        </p:spPr>
-        <p:txBody>
-          <a:bodyPr wrap="square" rtlCol="0" anchor="ctr"/>
-          <a:lstStyle/>
-          <a:p>
-            <a:pPr marL="0" indent="0">
-              <a:buNone/>
-            </a:pPr>
-            <a:r>
-              <a:rPr lang="en-US" sz="1200" b="1" dirty="0">
-                <a:solidFill>
-                  <a:srgbClr val="0D1B4B"/>
-                </a:solidFill>
-                <a:latin typeface="Georgia" pitchFamily="34" charset="0"/>
-                <a:ea typeface="Georgia" pitchFamily="34" charset="-122"/>
-                <a:cs typeface="Georgia" pitchFamily="34" charset="-120"/>
-              </a:rPr>
-              <a:t>Key Takeaways</a:t>
-            </a:r>
-            <a:endParaRPr lang="en-US" sz="1200" dirty="0"/>
-          </a:p>
-        </p:txBody>
-      </p:sp>
-      <p:sp>
-        <p:nvSpPr>
-          <p:cNvPr id="7" name="Shape 4"/>
-          <p:cNvSpPr/>
-          <p:nvPr/>
-        </p:nvSpPr>
-        <p:spPr>
-          <a:xfrm>
-            <a:off x="6675120" y="1316736"/>
-            <a:ext cx="201168" cy="201168"/>
-          </a:xfrm>
-          <a:prstGeom prst="rect">
-            <a:avLst/>
-          </a:prstGeom>
-          <a:solidFill>
-            <a:srgbClr val="E8660A"/>
-          </a:solidFill>
-          <a:ln w="12700">
-            <a:solidFill>
-              <a:srgbClr val="E8660A"/>
-            </a:solidFill>
-            <a:prstDash val="solid"/>
-          </a:ln>
-        </p:spPr>
-        <p:txBody>
-          <a:bodyPr/>
-          <a:lstStyle/>
-          <a:p>
-            <a:endParaRPr lang="en-US"/>
-          </a:p>
-        </p:txBody>
-      </p:sp>
-      <p:sp>
-        <p:nvSpPr>
-          <p:cNvPr id="8" name="Text 5"/>
-          <p:cNvSpPr/>
-          <p:nvPr/>
-        </p:nvSpPr>
-        <p:spPr>
-          <a:xfrm>
-            <a:off x="6967728" y="1261872"/>
-            <a:ext cx="1828800" cy="804672"/>
-          </a:xfrm>
-          <a:prstGeom prst="rect">
-            <a:avLst/>
-          </a:prstGeom>
-          <a:noFill/>
-          <a:ln/>
-        </p:spPr>
-        <p:txBody>
-          <a:bodyPr wrap="square" rtlCol="0" anchor="ctr"/>
-          <a:lstStyle/>
-          <a:p>
-            <a:pPr marL="0" indent="0">
-              <a:buNone/>
-            </a:pPr>
-            <a:r>
-              <a:rPr lang="en-US" sz="1000" dirty="0">
-                <a:solidFill>
-                  <a:srgbClr val="1E293B"/>
-                </a:solidFill>
-                <a:latin typeface="Calibri" pitchFamily="34" charset="0"/>
-                <a:ea typeface="Calibri" pitchFamily="34" charset="-122"/>
-                <a:cs typeface="Calibri" pitchFamily="34" charset="-120"/>
-              </a:rPr>
-              <a:t>Seed 1 claims 76% of Championship wins — completely dominant at the end</a:t>
-            </a:r>
-            <a:endParaRPr lang="en-US" sz="1000" dirty="0"/>
-          </a:p>
-        </p:txBody>
-      </p:sp>
-      <p:sp>
-        <p:nvSpPr>
-          <p:cNvPr id="9" name="Shape 6"/>
-          <p:cNvSpPr/>
-          <p:nvPr/>
-        </p:nvSpPr>
-        <p:spPr>
-          <a:xfrm>
-            <a:off x="6675120" y="2212848"/>
-            <a:ext cx="201168" cy="201168"/>
-          </a:xfrm>
-          <a:prstGeom prst="rect">
-            <a:avLst/>
-          </a:prstGeom>
-          <a:solidFill>
-            <a:srgbClr val="E8660A"/>
-          </a:solidFill>
-          <a:ln w="12700">
-            <a:solidFill>
-              <a:srgbClr val="E8660A"/>
-            </a:solidFill>
-            <a:prstDash val="solid"/>
-          </a:ln>
-        </p:spPr>
-        <p:txBody>
-          <a:bodyPr/>
-          <a:lstStyle/>
-          <a:p>
-            <a:endParaRPr lang="en-US"/>
-          </a:p>
-        </p:txBody>
-      </p:sp>
-      <p:sp>
-        <p:nvSpPr>
-          <p:cNvPr id="10" name="Text 7"/>
-          <p:cNvSpPr/>
-          <p:nvPr/>
-        </p:nvSpPr>
-        <p:spPr>
-          <a:xfrm>
-            <a:off x="6967728" y="2157984"/>
-            <a:ext cx="1828800" cy="804672"/>
-          </a:xfrm>
-          <a:prstGeom prst="rect">
-            <a:avLst/>
-          </a:prstGeom>
-          <a:noFill/>
-          <a:ln/>
-        </p:spPr>
-        <p:txBody>
-          <a:bodyPr wrap="square" rtlCol="0" anchor="ctr"/>
-          <a:lstStyle/>
-          <a:p>
-            <a:pPr marL="0" indent="0">
-              <a:buNone/>
-            </a:pPr>
-            <a:r>
-              <a:rPr lang="en-US" sz="1000" dirty="0">
-                <a:solidFill>
-                  <a:srgbClr val="1E293B"/>
-                </a:solidFill>
-                <a:latin typeface="Calibri" pitchFamily="34" charset="0"/>
-                <a:ea typeface="Calibri" pitchFamily="34" charset="-122"/>
-                <a:cs typeface="Calibri" pitchFamily="34" charset="-120"/>
-              </a:rPr>
-              <a:t>In the Round of 64, wins are spread relatively evenly across seeds 1–12</a:t>
-            </a:r>
-            <a:endParaRPr lang="en-US" sz="1000" dirty="0"/>
-          </a:p>
-        </p:txBody>
-      </p:sp>
-      <p:sp>
-        <p:nvSpPr>
-          <p:cNvPr id="11" name="Shape 8"/>
-          <p:cNvSpPr/>
-          <p:nvPr/>
-        </p:nvSpPr>
-        <p:spPr>
-          <a:xfrm>
-            <a:off x="6675120" y="3108960"/>
-            <a:ext cx="201168" cy="201168"/>
-          </a:xfrm>
-          <a:prstGeom prst="rect">
-            <a:avLst/>
-          </a:prstGeom>
-          <a:solidFill>
-            <a:srgbClr val="E8660A"/>
-          </a:solidFill>
-          <a:ln w="12700">
-            <a:solidFill>
-              <a:srgbClr val="E8660A"/>
-            </a:solidFill>
-            <a:prstDash val="solid"/>
-          </a:ln>
-        </p:spPr>
-        <p:txBody>
-          <a:bodyPr/>
-          <a:lstStyle/>
-          <a:p>
-            <a:endParaRPr lang="en-US"/>
-          </a:p>
-        </p:txBody>
-      </p:sp>
-      <p:sp>
-        <p:nvSpPr>
-          <p:cNvPr id="12" name="Text 9"/>
-          <p:cNvSpPr/>
-          <p:nvPr/>
-        </p:nvSpPr>
-        <p:spPr>
-          <a:xfrm>
-            <a:off x="6967728" y="3054096"/>
-            <a:ext cx="1828800" cy="804672"/>
-          </a:xfrm>
-          <a:prstGeom prst="rect">
-            <a:avLst/>
-          </a:prstGeom>
-          <a:noFill/>
-          <a:ln/>
-        </p:spPr>
-        <p:txBody>
-          <a:bodyPr wrap="square" rtlCol="0" anchor="ctr"/>
-          <a:lstStyle/>
-          <a:p>
-            <a:pPr marL="0" indent="0">
-              <a:buNone/>
-            </a:pPr>
-            <a:r>
-              <a:rPr lang="en-US" sz="1000" dirty="0">
-                <a:solidFill>
-                  <a:srgbClr val="1E293B"/>
-                </a:solidFill>
-                <a:latin typeface="Calibri" pitchFamily="34" charset="0"/>
-                <a:ea typeface="Calibri" pitchFamily="34" charset="-122"/>
-                <a:cs typeface="Calibri" pitchFamily="34" charset="-120"/>
-              </a:rPr>
-              <a:t>Only seeds 1–4 consistently appear in the Final Four and Championship</a:t>
-            </a:r>
-            <a:endParaRPr lang="en-US" sz="1000" dirty="0"/>
-          </a:p>
-        </p:txBody>
-      </p:sp>
-      <p:sp>
-        <p:nvSpPr>
-          <p:cNvPr id="13" name="Shape 10"/>
-          <p:cNvSpPr/>
-          <p:nvPr/>
-        </p:nvSpPr>
-        <p:spPr>
-          <a:xfrm>
-            <a:off x="6675120" y="4005072"/>
-            <a:ext cx="201168" cy="201168"/>
-          </a:xfrm>
-          <a:prstGeom prst="rect">
-            <a:avLst/>
-          </a:prstGeom>
-          <a:solidFill>
-            <a:srgbClr val="E8660A"/>
-          </a:solidFill>
-          <a:ln w="12700">
-            <a:solidFill>
-              <a:srgbClr val="E8660A"/>
-            </a:solidFill>
-            <a:prstDash val="solid"/>
-          </a:ln>
-        </p:spPr>
-        <p:txBody>
-          <a:bodyPr/>
-          <a:lstStyle/>
-          <a:p>
-            <a:endParaRPr lang="en-US"/>
-          </a:p>
-        </p:txBody>
-      </p:sp>
-      <p:sp>
-        <p:nvSpPr>
-          <p:cNvPr id="14" name="Text 11"/>
-          <p:cNvSpPr/>
-          <p:nvPr/>
-        </p:nvSpPr>
-        <p:spPr>
-          <a:xfrm>
-            <a:off x="6967728" y="3950208"/>
-            <a:ext cx="1828800" cy="804672"/>
-          </a:xfrm>
-          <a:prstGeom prst="rect">
-            <a:avLst/>
-          </a:prstGeom>
-          <a:noFill/>
-          <a:ln/>
-        </p:spPr>
-        <p:txBody>
-          <a:bodyPr wrap="square" rtlCol="0" anchor="ctr"/>
-          <a:lstStyle/>
-          <a:p>
-            <a:pPr marL="0" indent="0">
-              <a:buNone/>
-            </a:pPr>
-            <a:r>
-              <a:rPr lang="en-US" sz="1000" dirty="0">
-                <a:solidFill>
-                  <a:srgbClr val="1E293B"/>
-                </a:solidFill>
-                <a:latin typeface="Calibri" pitchFamily="34" charset="0"/>
-                <a:ea typeface="Calibri" pitchFamily="34" charset="-122"/>
-                <a:cs typeface="Calibri" pitchFamily="34" charset="-120"/>
-              </a:rPr>
-              <a:t>Seeds 5–8 vanish almost entirely by the Elite Eight</a:t>
-            </a:r>
-            <a:endParaRPr lang="en-US" sz="1000" dirty="0"/>
-          </a:p>
-        </p:txBody>
-      </p:sp>
-    </p:spTree>
-  </p:cSld>
-  <p:clrMapOvr>
-    <a:masterClrMapping/>
-  </p:clrMapOvr>
-</p:sld>
-</file>
-
-<file path=ppt/slides/slide9.xml><?xml version="1.0" encoding="utf-8"?>
 <p:sld xmlns:a="http://schemas.openxmlformats.org/drawingml/2006/main" xmlns:r="http://schemas.openxmlformats.org/officeDocument/2006/relationships" xmlns:p="http://schemas.openxmlformats.org/presentationml/2006/main">
   <p:cSld name="Slide 9">
     <p:bg>
@@ -12268,6 +10906,327 @@
           </a:p>
         </p:txBody>
       </p:sp>
+    </p:spTree>
+  </p:cSld>
+  <p:clrMapOvr>
+    <a:masterClrMapping/>
+  </p:clrMapOvr>
+</p:sld>
+</file>
+
+<file path=ppt/slides/slide9.xml><?xml version="1.0" encoding="utf-8"?>
+<p:sld xmlns:a="http://schemas.openxmlformats.org/drawingml/2006/main" xmlns:r="http://schemas.openxmlformats.org/officeDocument/2006/relationships" xmlns:p="http://schemas.openxmlformats.org/presentationml/2006/main">
+  <p:cSld name="Slide 10">
+    <p:bg>
+      <p:bgPr>
+        <a:solidFill>
+          <a:srgbClr val="F4F6FB"/>
+        </a:solidFill>
+        <a:effectLst/>
+      </p:bgPr>
+    </p:bg>
+    <p:spTree>
+      <p:nvGrpSpPr>
+        <p:cNvPr id="1" name=""/>
+        <p:cNvGrpSpPr/>
+        <p:nvPr/>
+      </p:nvGrpSpPr>
+      <p:grpSpPr>
+        <a:xfrm>
+          <a:off x="0" y="0"/>
+          <a:ext cx="0" cy="0"/>
+          <a:chOff x="0" y="0"/>
+          <a:chExt cx="0" cy="0"/>
+        </a:xfrm>
+      </p:grpSpPr>
+      <p:sp>
+        <p:nvSpPr>
+          <p:cNvPr id="2" name="Shape 0"/>
+          <p:cNvSpPr/>
+          <p:nvPr/>
+        </p:nvSpPr>
+        <p:spPr>
+          <a:xfrm>
+            <a:off x="0" y="0"/>
+            <a:ext cx="9144000" cy="640080"/>
+          </a:xfrm>
+          <a:prstGeom prst="rect">
+            <a:avLst/>
+          </a:prstGeom>
+          <a:solidFill>
+            <a:srgbClr val="0D1B4B"/>
+          </a:solidFill>
+          <a:ln w="12700">
+            <a:solidFill>
+              <a:srgbClr val="0D1B4B"/>
+            </a:solidFill>
+            <a:prstDash val="solid"/>
+          </a:ln>
+        </p:spPr>
+        <p:txBody>
+          <a:bodyPr/>
+          <a:lstStyle/>
+          <a:p>
+            <a:endParaRPr lang="en-US"/>
+          </a:p>
+        </p:txBody>
+      </p:sp>
+      <p:sp>
+        <p:nvSpPr>
+          <p:cNvPr id="3" name="Text 1"/>
+          <p:cNvSpPr/>
+          <p:nvPr/>
+        </p:nvSpPr>
+        <p:spPr>
+          <a:xfrm>
+            <a:off x="365760" y="73152"/>
+            <a:ext cx="8412480" cy="502920"/>
+          </a:xfrm>
+          <a:prstGeom prst="rect">
+            <a:avLst/>
+          </a:prstGeom>
+          <a:noFill/>
+          <a:ln/>
+        </p:spPr>
+        <p:txBody>
+          <a:bodyPr wrap="square" rtlCol="0" anchor="ctr"/>
+          <a:lstStyle/>
+          <a:p>
+            <a:pPr marL="0" indent="0">
+              <a:buNone/>
+            </a:pPr>
+            <a:r>
+              <a:rPr lang="en-US" sz="2400" b="1" dirty="0">
+                <a:solidFill>
+                  <a:srgbClr val="FFFFFF"/>
+                </a:solidFill>
+                <a:latin typeface="Georgia" pitchFamily="34" charset="0"/>
+                <a:ea typeface="Georgia" pitchFamily="34" charset="-122"/>
+                <a:cs typeface="Georgia" pitchFamily="34" charset="-120"/>
+              </a:rPr>
+              <a:t>Finding 3b: NIL Era vs. Pre-NIL Upset Rates</a:t>
+            </a:r>
+            <a:endParaRPr lang="en-US" sz="2400" dirty="0"/>
+          </a:p>
+        </p:txBody>
+      </p:sp>
+      <p:sp>
+        <p:nvSpPr>
+          <p:cNvPr id="6" name="Text 2"/>
+          <p:cNvSpPr/>
+          <p:nvPr/>
+        </p:nvSpPr>
+        <p:spPr>
+          <a:xfrm>
+            <a:off x="274320" y="4005072"/>
+            <a:ext cx="2651760" cy="301752"/>
+          </a:xfrm>
+          <a:prstGeom prst="rect">
+            <a:avLst/>
+          </a:prstGeom>
+          <a:noFill/>
+          <a:ln/>
+        </p:spPr>
+        <p:txBody>
+          <a:bodyPr wrap="square" rtlCol="0" anchor="ctr"/>
+          <a:lstStyle/>
+          <a:p>
+            <a:pPr marL="0" indent="0" algn="ctr">
+              <a:buNone/>
+            </a:pPr>
+            <a:endParaRPr lang="en-US" sz="1000" dirty="0"/>
+          </a:p>
+        </p:txBody>
+      </p:sp>
+      <p:sp>
+        <p:nvSpPr>
+          <p:cNvPr id="7" name="Text 3"/>
+          <p:cNvSpPr/>
+          <p:nvPr/>
+        </p:nvSpPr>
+        <p:spPr>
+          <a:xfrm>
+            <a:off x="4572000" y="4005072"/>
+            <a:ext cx="4343400" cy="274320"/>
+          </a:xfrm>
+          <a:prstGeom prst="rect">
+            <a:avLst/>
+          </a:prstGeom>
+          <a:noFill/>
+          <a:ln/>
+        </p:spPr>
+        <p:txBody>
+          <a:bodyPr wrap="square" rtlCol="0" anchor="ctr"/>
+          <a:lstStyle/>
+          <a:p>
+            <a:pPr marL="0" indent="0" algn="ctr">
+              <a:buNone/>
+            </a:pPr>
+            <a:endParaRPr lang="en-US" sz="1000" dirty="0"/>
+          </a:p>
+        </p:txBody>
+      </p:sp>
+      <p:sp>
+        <p:nvSpPr>
+          <p:cNvPr id="8" name="Shape 4"/>
+          <p:cNvSpPr/>
+          <p:nvPr/>
+        </p:nvSpPr>
+        <p:spPr>
+          <a:xfrm>
+            <a:off x="324464" y="3539613"/>
+            <a:ext cx="4566101" cy="1443867"/>
+          </a:xfrm>
+          <a:prstGeom prst="rect">
+            <a:avLst/>
+          </a:prstGeom>
+          <a:solidFill>
+            <a:srgbClr val="FFFFFF"/>
+          </a:solidFill>
+          <a:ln w="6350">
+            <a:solidFill>
+              <a:srgbClr val="D8DEE8"/>
+            </a:solidFill>
+            <a:prstDash val="solid"/>
+          </a:ln>
+        </p:spPr>
+        <p:txBody>
+          <a:bodyPr/>
+          <a:lstStyle/>
+          <a:p>
+            <a:endParaRPr lang="en-US" dirty="0"/>
+          </a:p>
+        </p:txBody>
+      </p:sp>
+      <p:sp>
+        <p:nvSpPr>
+          <p:cNvPr id="9" name="Text 5"/>
+          <p:cNvSpPr/>
+          <p:nvPr/>
+        </p:nvSpPr>
+        <p:spPr>
+          <a:xfrm>
+            <a:off x="365761" y="3539613"/>
+            <a:ext cx="4206240" cy="1345201"/>
+          </a:xfrm>
+          <a:prstGeom prst="rect">
+            <a:avLst/>
+          </a:prstGeom>
+          <a:noFill/>
+          <a:ln/>
+        </p:spPr>
+        <p:txBody>
+          <a:bodyPr wrap="square" rtlCol="0" anchor="ctr"/>
+          <a:lstStyle/>
+          <a:p>
+            <a:pPr marL="0" indent="0" algn="l">
+              <a:buNone/>
+            </a:pPr>
+            <a:r>
+              <a:rPr lang="en-US" sz="1050" dirty="0">
+                <a:solidFill>
+                  <a:srgbClr val="1E293B"/>
+                </a:solidFill>
+                <a:latin typeface="Calibri" pitchFamily="34" charset="0"/>
+                <a:ea typeface="Calibri" pitchFamily="34" charset="-122"/>
+                <a:cs typeface="Calibri" pitchFamily="34" charset="-120"/>
+              </a:rPr>
+              <a:t>NIL Era (2022+): 21.5% upset rate vs. Pre-NIL (2008–2021): 28.5%.  The NIL era shows lower upset rates across nearly every round — top programs may be better at retaining star talent. </a:t>
+            </a:r>
+            <a:endParaRPr lang="en-US" sz="1050" dirty="0"/>
+          </a:p>
+        </p:txBody>
+      </p:sp>
+      <p:pic>
+        <p:nvPicPr>
+          <p:cNvPr id="15" name="Picture 14">
+            <a:extLst>
+              <a:ext uri="{FF2B5EF4-FFF2-40B4-BE49-F238E27FC236}">
+                <a16:creationId xmlns:a16="http://schemas.microsoft.com/office/drawing/2014/main" id="{67E0E947-58EB-D702-5724-1196640EBFFD}"/>
+              </a:ext>
+            </a:extLst>
+          </p:cNvPr>
+          <p:cNvPicPr>
+            <a:picLocks noChangeAspect="1"/>
+          </p:cNvPicPr>
+          <p:nvPr/>
+        </p:nvPicPr>
+        <p:blipFill>
+          <a:blip r:embed="rId3"/>
+          <a:stretch>
+            <a:fillRect/>
+          </a:stretch>
+        </p:blipFill>
+        <p:spPr>
+          <a:xfrm>
+            <a:off x="4208216" y="746471"/>
+            <a:ext cx="3920674" cy="2554513"/>
+          </a:xfrm>
+          <a:prstGeom prst="rect">
+            <a:avLst/>
+          </a:prstGeom>
+        </p:spPr>
+      </p:pic>
+      <p:pic>
+        <p:nvPicPr>
+          <p:cNvPr id="17" name="Picture 16">
+            <a:extLst>
+              <a:ext uri="{FF2B5EF4-FFF2-40B4-BE49-F238E27FC236}">
+                <a16:creationId xmlns:a16="http://schemas.microsoft.com/office/drawing/2014/main" id="{1FB88FE1-7389-4E3D-FD36-BD242B79FBC5}"/>
+              </a:ext>
+            </a:extLst>
+          </p:cNvPr>
+          <p:cNvPicPr>
+            <a:picLocks noChangeAspect="1"/>
+          </p:cNvPicPr>
+          <p:nvPr/>
+        </p:nvPicPr>
+        <p:blipFill>
+          <a:blip r:embed="rId4"/>
+          <a:stretch>
+            <a:fillRect/>
+          </a:stretch>
+        </p:blipFill>
+        <p:spPr>
+          <a:xfrm>
+            <a:off x="274320" y="713232"/>
+            <a:ext cx="3832218" cy="2595568"/>
+          </a:xfrm>
+          <a:prstGeom prst="rect">
+            <a:avLst/>
+          </a:prstGeom>
+        </p:spPr>
+      </p:pic>
+      <p:pic>
+        <p:nvPicPr>
+          <p:cNvPr id="19" name="Picture 18">
+            <a:extLst>
+              <a:ext uri="{FF2B5EF4-FFF2-40B4-BE49-F238E27FC236}">
+                <a16:creationId xmlns:a16="http://schemas.microsoft.com/office/drawing/2014/main" id="{A0D5F88A-CD1B-3FDE-6880-A29FE865B443}"/>
+              </a:ext>
+            </a:extLst>
+          </p:cNvPr>
+          <p:cNvPicPr>
+            <a:picLocks noChangeAspect="1"/>
+          </p:cNvPicPr>
+          <p:nvPr/>
+        </p:nvPicPr>
+        <p:blipFill>
+          <a:blip r:embed="rId5"/>
+          <a:stretch>
+            <a:fillRect/>
+          </a:stretch>
+        </p:blipFill>
+        <p:spPr>
+          <a:xfrm>
+            <a:off x="5031578" y="3498316"/>
+            <a:ext cx="3787958" cy="1485164"/>
+          </a:xfrm>
+          <a:prstGeom prst="rect">
+            <a:avLst/>
+          </a:prstGeom>
+        </p:spPr>
+      </p:pic>
     </p:spTree>
   </p:cSld>
   <p:clrMapOvr>
@@ -12884,4 +11843,10 @@
     </a:ext>
   </a:extLst>
 </a:theme>
+</file>
+
+<file path=docMetadata/LabelInfo.xml><?xml version="1.0" encoding="utf-8"?>
+<clbl:labelList xmlns:clbl="http://schemas.microsoft.com/office/2020/mipLabelMetadata">
+  <clbl:label id="{29196f36-1d5e-4d26-8945-3be41ba81178}" enabled="0" method="" siteId="{29196f36-1d5e-4d26-8945-3be41ba81178}" removed="1"/>
+</clbl:labelList>
 </file>